--- a/src/main/resources/static/image/default/enemy.pptx
+++ b/src/main/resources/static/image/default/enemy.pptx
@@ -251,7 +251,7 @@
           <a:p>
             <a:fld id="{0E085FA6-3BB9-47BA-8D81-299A75D1B58A}" type="datetimeFigureOut">
               <a:rPr kumimoji="1" lang="ja-JP" altLang="en-US" smtClean="0"/>
-              <a:t>2025/10/6</a:t>
+              <a:t>2026/3/5</a:t>
             </a:fld>
             <a:endParaRPr kumimoji="1" lang="ja-JP" altLang="en-US"/>
           </a:p>
@@ -451,7 +451,7 @@
           <a:p>
             <a:fld id="{0E085FA6-3BB9-47BA-8D81-299A75D1B58A}" type="datetimeFigureOut">
               <a:rPr kumimoji="1" lang="ja-JP" altLang="en-US" smtClean="0"/>
-              <a:t>2025/10/6</a:t>
+              <a:t>2026/3/5</a:t>
             </a:fld>
             <a:endParaRPr kumimoji="1" lang="ja-JP" altLang="en-US"/>
           </a:p>
@@ -661,7 +661,7 @@
           <a:p>
             <a:fld id="{0E085FA6-3BB9-47BA-8D81-299A75D1B58A}" type="datetimeFigureOut">
               <a:rPr kumimoji="1" lang="ja-JP" altLang="en-US" smtClean="0"/>
-              <a:t>2025/10/6</a:t>
+              <a:t>2026/3/5</a:t>
             </a:fld>
             <a:endParaRPr kumimoji="1" lang="ja-JP" altLang="en-US"/>
           </a:p>
@@ -861,7 +861,7 @@
           <a:p>
             <a:fld id="{0E085FA6-3BB9-47BA-8D81-299A75D1B58A}" type="datetimeFigureOut">
               <a:rPr kumimoji="1" lang="ja-JP" altLang="en-US" smtClean="0"/>
-              <a:t>2025/10/6</a:t>
+              <a:t>2026/3/5</a:t>
             </a:fld>
             <a:endParaRPr kumimoji="1" lang="ja-JP" altLang="en-US"/>
           </a:p>
@@ -1106,7 +1106,7 @@
           <a:p>
             <a:fld id="{0E085FA6-3BB9-47BA-8D81-299A75D1B58A}" type="datetimeFigureOut">
               <a:rPr kumimoji="1" lang="ja-JP" altLang="en-US" smtClean="0"/>
-              <a:t>2025/10/6</a:t>
+              <a:t>2026/3/5</a:t>
             </a:fld>
             <a:endParaRPr kumimoji="1" lang="ja-JP" altLang="en-US"/>
           </a:p>
@@ -1399,7 +1399,7 @@
           <a:p>
             <a:fld id="{0E085FA6-3BB9-47BA-8D81-299A75D1B58A}" type="datetimeFigureOut">
               <a:rPr kumimoji="1" lang="ja-JP" altLang="en-US" smtClean="0"/>
-              <a:t>2025/10/6</a:t>
+              <a:t>2026/3/5</a:t>
             </a:fld>
             <a:endParaRPr kumimoji="1" lang="ja-JP" altLang="en-US"/>
           </a:p>
@@ -1827,7 +1827,7 @@
           <a:p>
             <a:fld id="{0E085FA6-3BB9-47BA-8D81-299A75D1B58A}" type="datetimeFigureOut">
               <a:rPr kumimoji="1" lang="ja-JP" altLang="en-US" smtClean="0"/>
-              <a:t>2025/10/6</a:t>
+              <a:t>2026/3/5</a:t>
             </a:fld>
             <a:endParaRPr kumimoji="1" lang="ja-JP" altLang="en-US"/>
           </a:p>
@@ -1944,7 +1944,7 @@
           <a:p>
             <a:fld id="{0E085FA6-3BB9-47BA-8D81-299A75D1B58A}" type="datetimeFigureOut">
               <a:rPr kumimoji="1" lang="ja-JP" altLang="en-US" smtClean="0"/>
-              <a:t>2025/10/6</a:t>
+              <a:t>2026/3/5</a:t>
             </a:fld>
             <a:endParaRPr kumimoji="1" lang="ja-JP" altLang="en-US"/>
           </a:p>
@@ -2039,7 +2039,7 @@
           <a:p>
             <a:fld id="{0E085FA6-3BB9-47BA-8D81-299A75D1B58A}" type="datetimeFigureOut">
               <a:rPr kumimoji="1" lang="ja-JP" altLang="en-US" smtClean="0"/>
-              <a:t>2025/10/6</a:t>
+              <a:t>2026/3/5</a:t>
             </a:fld>
             <a:endParaRPr kumimoji="1" lang="ja-JP" altLang="en-US"/>
           </a:p>
@@ -2346,7 +2346,7 @@
           <a:p>
             <a:fld id="{0E085FA6-3BB9-47BA-8D81-299A75D1B58A}" type="datetimeFigureOut">
               <a:rPr kumimoji="1" lang="ja-JP" altLang="en-US" smtClean="0"/>
-              <a:t>2025/10/6</a:t>
+              <a:t>2026/3/5</a:t>
             </a:fld>
             <a:endParaRPr kumimoji="1" lang="ja-JP" altLang="en-US"/>
           </a:p>
@@ -2598,7 +2598,7 @@
           <a:p>
             <a:fld id="{0E085FA6-3BB9-47BA-8D81-299A75D1B58A}" type="datetimeFigureOut">
               <a:rPr kumimoji="1" lang="ja-JP" altLang="en-US" smtClean="0"/>
-              <a:t>2025/10/6</a:t>
+              <a:t>2026/3/5</a:t>
             </a:fld>
             <a:endParaRPr kumimoji="1" lang="ja-JP" altLang="en-US"/>
           </a:p>
@@ -2841,7 +2841,7 @@
           <a:p>
             <a:fld id="{0E085FA6-3BB9-47BA-8D81-299A75D1B58A}" type="datetimeFigureOut">
               <a:rPr kumimoji="1" lang="ja-JP" altLang="en-US" smtClean="0"/>
-              <a:t>2025/10/6</a:t>
+              <a:t>2026/3/5</a:t>
             </a:fld>
             <a:endParaRPr kumimoji="1" lang="ja-JP" altLang="en-US"/>
           </a:p>
@@ -3260,9 +3260,7 @@
           <a:prstGeom prst="rect">
             <a:avLst/>
           </a:prstGeom>
-          <a:solidFill>
-            <a:schemeClr val="bg1"/>
-          </a:solidFill>
+          <a:noFill/>
           <a:ln>
             <a:solidFill>
               <a:schemeClr val="tx1"/>
@@ -3308,9 +3306,7 @@
           <a:prstGeom prst="rect">
             <a:avLst/>
           </a:prstGeom>
-          <a:solidFill>
-            <a:schemeClr val="bg1"/>
-          </a:solidFill>
+          <a:noFill/>
           <a:ln>
             <a:solidFill>
               <a:schemeClr val="tx1"/>
@@ -3356,9 +3352,7 @@
           <a:prstGeom prst="rect">
             <a:avLst/>
           </a:prstGeom>
-          <a:solidFill>
-            <a:schemeClr val="bg1"/>
-          </a:solidFill>
+          <a:noFill/>
           <a:ln>
             <a:solidFill>
               <a:schemeClr val="tx1"/>
@@ -3404,9 +3398,7 @@
           <a:prstGeom prst="rect">
             <a:avLst/>
           </a:prstGeom>
-          <a:solidFill>
-            <a:schemeClr val="bg1"/>
-          </a:solidFill>
+          <a:noFill/>
           <a:ln>
             <a:solidFill>
               <a:schemeClr val="tx1"/>
@@ -3452,9 +3444,7 @@
           <a:prstGeom prst="rect">
             <a:avLst/>
           </a:prstGeom>
-          <a:solidFill>
-            <a:schemeClr val="bg1"/>
-          </a:solidFill>
+          <a:noFill/>
           <a:ln>
             <a:solidFill>
               <a:schemeClr val="tx1"/>
@@ -3500,9 +3490,7 @@
           <a:prstGeom prst="rect">
             <a:avLst/>
           </a:prstGeom>
-          <a:solidFill>
-            <a:schemeClr val="bg1"/>
-          </a:solidFill>
+          <a:noFill/>
           <a:ln>
             <a:solidFill>
               <a:schemeClr val="tx1"/>
@@ -4941,9 +4929,7 @@
           <a:prstGeom prst="rect">
             <a:avLst/>
           </a:prstGeom>
-          <a:solidFill>
-            <a:schemeClr val="bg1"/>
-          </a:solidFill>
+          <a:noFill/>
           <a:ln>
             <a:solidFill>
               <a:schemeClr val="tx1"/>
@@ -4989,9 +4975,7 @@
           <a:prstGeom prst="rect">
             <a:avLst/>
           </a:prstGeom>
-          <a:solidFill>
-            <a:schemeClr val="bg1"/>
-          </a:solidFill>
+          <a:noFill/>
           <a:ln>
             <a:solidFill>
               <a:schemeClr val="tx1"/>
@@ -5037,9 +5021,7 @@
           <a:prstGeom prst="rect">
             <a:avLst/>
           </a:prstGeom>
-          <a:solidFill>
-            <a:schemeClr val="bg1"/>
-          </a:solidFill>
+          <a:noFill/>
           <a:ln>
             <a:solidFill>
               <a:schemeClr val="tx1"/>
@@ -5085,9 +5067,7 @@
           <a:prstGeom prst="rect">
             <a:avLst/>
           </a:prstGeom>
-          <a:solidFill>
-            <a:schemeClr val="bg1"/>
-          </a:solidFill>
+          <a:noFill/>
           <a:ln>
             <a:solidFill>
               <a:schemeClr val="tx1"/>
@@ -5133,9 +5113,7 @@
           <a:prstGeom prst="rect">
             <a:avLst/>
           </a:prstGeom>
-          <a:solidFill>
-            <a:schemeClr val="bg1"/>
-          </a:solidFill>
+          <a:noFill/>
           <a:ln>
             <a:solidFill>
               <a:schemeClr val="tx1"/>
@@ -5181,9 +5159,7 @@
           <a:prstGeom prst="rect">
             <a:avLst/>
           </a:prstGeom>
-          <a:solidFill>
-            <a:schemeClr val="bg1"/>
-          </a:solidFill>
+          <a:noFill/>
           <a:ln>
             <a:solidFill>
               <a:schemeClr val="tx1"/>
@@ -5237,6 +5213,7 @@
           <a:prstGeom prst="rect">
             <a:avLst/>
           </a:prstGeom>
+          <a:noFill/>
         </p:spPr>
       </p:pic>
       <p:pic>
@@ -5261,6 +5238,7 @@
           <a:prstGeom prst="rect">
             <a:avLst/>
           </a:prstGeom>
+          <a:noFill/>
         </p:spPr>
       </p:pic>
       <p:pic>
@@ -5285,6 +5263,7 @@
           <a:prstGeom prst="rect">
             <a:avLst/>
           </a:prstGeom>
+          <a:noFill/>
         </p:spPr>
       </p:pic>
       <p:pic>
@@ -5309,6 +5288,7 @@
           <a:prstGeom prst="rect">
             <a:avLst/>
           </a:prstGeom>
+          <a:noFill/>
         </p:spPr>
       </p:pic>
       <p:pic>
@@ -5333,6 +5313,7 @@
           <a:prstGeom prst="rect">
             <a:avLst/>
           </a:prstGeom>
+          <a:noFill/>
         </p:spPr>
       </p:pic>
       <p:pic>
@@ -5357,6 +5338,7 @@
           <a:prstGeom prst="rect">
             <a:avLst/>
           </a:prstGeom>
+          <a:noFill/>
         </p:spPr>
       </p:pic>
       <p:sp>
@@ -5373,9 +5355,7 @@
           <a:prstGeom prst="rect">
             <a:avLst/>
           </a:prstGeom>
-          <a:solidFill>
-            <a:schemeClr val="bg1"/>
-          </a:solidFill>
+          <a:noFill/>
           <a:ln>
             <a:solidFill>
               <a:schemeClr val="tx1"/>
@@ -5429,6 +5409,7 @@
           <a:prstGeom prst="rect">
             <a:avLst/>
           </a:prstGeom>
+          <a:noFill/>
         </p:spPr>
       </p:pic>
     </p:spTree>
@@ -5475,9 +5456,7 @@
           <a:prstGeom prst="rect">
             <a:avLst/>
           </a:prstGeom>
-          <a:solidFill>
-            <a:schemeClr val="bg1"/>
-          </a:solidFill>
+          <a:noFill/>
           <a:ln>
             <a:solidFill>
               <a:schemeClr val="tx1"/>
@@ -5523,9 +5502,7 @@
           <a:prstGeom prst="rect">
             <a:avLst/>
           </a:prstGeom>
-          <a:solidFill>
-            <a:schemeClr val="bg1"/>
-          </a:solidFill>
+          <a:noFill/>
           <a:ln>
             <a:solidFill>
               <a:schemeClr val="tx1"/>
@@ -5571,9 +5548,7 @@
           <a:prstGeom prst="rect">
             <a:avLst/>
           </a:prstGeom>
-          <a:solidFill>
-            <a:schemeClr val="bg1"/>
-          </a:solidFill>
+          <a:noFill/>
           <a:ln>
             <a:solidFill>
               <a:schemeClr val="tx1"/>
@@ -5619,9 +5594,7 @@
           <a:prstGeom prst="rect">
             <a:avLst/>
           </a:prstGeom>
-          <a:solidFill>
-            <a:schemeClr val="bg1"/>
-          </a:solidFill>
+          <a:noFill/>
           <a:ln>
             <a:solidFill>
               <a:schemeClr val="tx1"/>
@@ -5667,9 +5640,7 @@
           <a:prstGeom prst="rect">
             <a:avLst/>
           </a:prstGeom>
-          <a:solidFill>
-            <a:schemeClr val="bg1"/>
-          </a:solidFill>
+          <a:noFill/>
           <a:ln>
             <a:solidFill>
               <a:schemeClr val="tx1"/>
@@ -5715,9 +5686,7 @@
           <a:prstGeom prst="rect">
             <a:avLst/>
           </a:prstGeom>
-          <a:solidFill>
-            <a:schemeClr val="bg1"/>
-          </a:solidFill>
+          <a:noFill/>
           <a:ln>
             <a:solidFill>
               <a:schemeClr val="tx1"/>
@@ -5771,6 +5740,7 @@
           <a:prstGeom prst="rect">
             <a:avLst/>
           </a:prstGeom>
+          <a:noFill/>
         </p:spPr>
       </p:pic>
       <p:pic>
@@ -5795,6 +5765,7 @@
           <a:prstGeom prst="rect">
             <a:avLst/>
           </a:prstGeom>
+          <a:noFill/>
         </p:spPr>
       </p:pic>
       <p:pic>
@@ -5819,6 +5790,7 @@
           <a:prstGeom prst="rect">
             <a:avLst/>
           </a:prstGeom>
+          <a:noFill/>
         </p:spPr>
       </p:pic>
       <p:pic>
@@ -5843,6 +5815,7 @@
           <a:prstGeom prst="rect">
             <a:avLst/>
           </a:prstGeom>
+          <a:noFill/>
         </p:spPr>
       </p:pic>
       <p:pic>
@@ -5867,6 +5840,7 @@
           <a:prstGeom prst="rect">
             <a:avLst/>
           </a:prstGeom>
+          <a:noFill/>
         </p:spPr>
       </p:pic>
       <p:pic>
@@ -5891,6 +5865,7 @@
           <a:prstGeom prst="rect">
             <a:avLst/>
           </a:prstGeom>
+          <a:noFill/>
         </p:spPr>
       </p:pic>
       <p:sp>
@@ -5907,9 +5882,7 @@
           <a:prstGeom prst="rect">
             <a:avLst/>
           </a:prstGeom>
-          <a:solidFill>
-            <a:schemeClr val="bg1"/>
-          </a:solidFill>
+          <a:noFill/>
           <a:ln>
             <a:solidFill>
               <a:schemeClr val="tx1"/>
@@ -5963,6 +5936,7 @@
           <a:prstGeom prst="rect">
             <a:avLst/>
           </a:prstGeom>
+          <a:noFill/>
         </p:spPr>
       </p:pic>
     </p:spTree>
@@ -6021,9 +5995,7 @@
           <a:prstGeom prst="rect">
             <a:avLst/>
           </a:prstGeom>
-          <a:solidFill>
-            <a:schemeClr val="bg1"/>
-          </a:solidFill>
+          <a:noFill/>
           <a:ln>
             <a:solidFill>
               <a:schemeClr val="tx1"/>
@@ -6075,9 +6047,7 @@
           <a:prstGeom prst="rect">
             <a:avLst/>
           </a:prstGeom>
-          <a:solidFill>
-            <a:schemeClr val="bg1"/>
-          </a:solidFill>
+          <a:noFill/>
           <a:ln>
             <a:solidFill>
               <a:schemeClr val="tx1"/>
@@ -6129,9 +6099,7 @@
           <a:prstGeom prst="rect">
             <a:avLst/>
           </a:prstGeom>
-          <a:solidFill>
-            <a:schemeClr val="bg1"/>
-          </a:solidFill>
+          <a:noFill/>
           <a:ln>
             <a:solidFill>
               <a:schemeClr val="tx1"/>
@@ -6183,9 +6151,7 @@
           <a:prstGeom prst="rect">
             <a:avLst/>
           </a:prstGeom>
-          <a:solidFill>
-            <a:schemeClr val="bg1"/>
-          </a:solidFill>
+          <a:noFill/>
           <a:ln>
             <a:solidFill>
               <a:schemeClr val="tx1"/>
@@ -6237,9 +6203,7 @@
           <a:prstGeom prst="rect">
             <a:avLst/>
           </a:prstGeom>
-          <a:solidFill>
-            <a:schemeClr val="bg1"/>
-          </a:solidFill>
+          <a:noFill/>
           <a:ln>
             <a:solidFill>
               <a:schemeClr val="tx1"/>
@@ -6291,9 +6255,7 @@
           <a:prstGeom prst="rect">
             <a:avLst/>
           </a:prstGeom>
-          <a:solidFill>
-            <a:schemeClr val="bg1"/>
-          </a:solidFill>
+          <a:noFill/>
           <a:ln>
             <a:solidFill>
               <a:schemeClr val="tx1"/>
@@ -6345,9 +6307,7 @@
           <a:prstGeom prst="rect">
             <a:avLst/>
           </a:prstGeom>
-          <a:solidFill>
-            <a:schemeClr val="bg1"/>
-          </a:solidFill>
+          <a:noFill/>
           <a:ln>
             <a:solidFill>
               <a:schemeClr val="tx1"/>
@@ -6407,6 +6367,7 @@
           <a:prstGeom prst="rect">
             <a:avLst/>
           </a:prstGeom>
+          <a:noFill/>
         </p:spPr>
       </p:pic>
       <p:pic>
@@ -6437,6 +6398,7 @@
           <a:prstGeom prst="rect">
             <a:avLst/>
           </a:prstGeom>
+          <a:noFill/>
         </p:spPr>
       </p:pic>
       <p:pic>
@@ -6467,6 +6429,7 @@
           <a:prstGeom prst="rect">
             <a:avLst/>
           </a:prstGeom>
+          <a:noFill/>
         </p:spPr>
       </p:pic>
       <p:pic>
@@ -6497,6 +6460,7 @@
           <a:prstGeom prst="rect">
             <a:avLst/>
           </a:prstGeom>
+          <a:noFill/>
         </p:spPr>
       </p:pic>
       <p:pic>
@@ -6527,6 +6491,7 @@
           <a:prstGeom prst="rect">
             <a:avLst/>
           </a:prstGeom>
+          <a:noFill/>
         </p:spPr>
       </p:pic>
       <p:pic>
@@ -6557,6 +6522,7 @@
           <a:prstGeom prst="rect">
             <a:avLst/>
           </a:prstGeom>
+          <a:noFill/>
         </p:spPr>
       </p:pic>
       <p:pic>
@@ -6587,6 +6553,7 @@
           <a:prstGeom prst="rect">
             <a:avLst/>
           </a:prstGeom>
+          <a:noFill/>
         </p:spPr>
       </p:pic>
     </p:spTree>
@@ -6645,9 +6612,7 @@
           <a:prstGeom prst="rect">
             <a:avLst/>
           </a:prstGeom>
-          <a:solidFill>
-            <a:schemeClr val="bg1"/>
-          </a:solidFill>
+          <a:noFill/>
           <a:ln>
             <a:solidFill>
               <a:schemeClr val="tx1"/>
@@ -6699,9 +6664,7 @@
           <a:prstGeom prst="rect">
             <a:avLst/>
           </a:prstGeom>
-          <a:solidFill>
-            <a:schemeClr val="bg1"/>
-          </a:solidFill>
+          <a:noFill/>
           <a:ln>
             <a:solidFill>
               <a:schemeClr val="tx1"/>
@@ -6753,9 +6716,7 @@
           <a:prstGeom prst="rect">
             <a:avLst/>
           </a:prstGeom>
-          <a:solidFill>
-            <a:schemeClr val="bg1"/>
-          </a:solidFill>
+          <a:noFill/>
           <a:ln>
             <a:solidFill>
               <a:schemeClr val="tx1"/>
@@ -6807,9 +6768,7 @@
           <a:prstGeom prst="rect">
             <a:avLst/>
           </a:prstGeom>
-          <a:solidFill>
-            <a:schemeClr val="bg1"/>
-          </a:solidFill>
+          <a:noFill/>
           <a:ln>
             <a:solidFill>
               <a:schemeClr val="tx1"/>
@@ -6861,9 +6820,7 @@
           <a:prstGeom prst="rect">
             <a:avLst/>
           </a:prstGeom>
-          <a:solidFill>
-            <a:schemeClr val="bg1"/>
-          </a:solidFill>
+          <a:noFill/>
           <a:ln>
             <a:solidFill>
               <a:schemeClr val="tx1"/>
@@ -6915,9 +6872,7 @@
           <a:prstGeom prst="rect">
             <a:avLst/>
           </a:prstGeom>
-          <a:solidFill>
-            <a:schemeClr val="bg1"/>
-          </a:solidFill>
+          <a:noFill/>
           <a:ln>
             <a:solidFill>
               <a:schemeClr val="tx1"/>
@@ -6969,9 +6924,7 @@
           <a:prstGeom prst="rect">
             <a:avLst/>
           </a:prstGeom>
-          <a:solidFill>
-            <a:schemeClr val="bg1"/>
-          </a:solidFill>
+          <a:noFill/>
           <a:ln>
             <a:solidFill>
               <a:schemeClr val="tx1"/>
@@ -7031,6 +6984,7 @@
           <a:prstGeom prst="rect">
             <a:avLst/>
           </a:prstGeom>
+          <a:noFill/>
         </p:spPr>
       </p:pic>
       <p:pic>
@@ -7061,6 +7015,7 @@
           <a:prstGeom prst="rect">
             <a:avLst/>
           </a:prstGeom>
+          <a:noFill/>
         </p:spPr>
       </p:pic>
       <p:pic>
@@ -7091,6 +7046,7 @@
           <a:prstGeom prst="rect">
             <a:avLst/>
           </a:prstGeom>
+          <a:noFill/>
         </p:spPr>
       </p:pic>
       <p:pic>
@@ -7121,6 +7077,7 @@
           <a:prstGeom prst="rect">
             <a:avLst/>
           </a:prstGeom>
+          <a:noFill/>
         </p:spPr>
       </p:pic>
       <p:pic>
@@ -7151,6 +7108,7 @@
           <a:prstGeom prst="rect">
             <a:avLst/>
           </a:prstGeom>
+          <a:noFill/>
         </p:spPr>
       </p:pic>
       <p:pic>
@@ -7181,6 +7139,7 @@
           <a:prstGeom prst="rect">
             <a:avLst/>
           </a:prstGeom>
+          <a:noFill/>
         </p:spPr>
       </p:pic>
       <p:pic>
@@ -7211,6 +7170,7 @@
           <a:prstGeom prst="rect">
             <a:avLst/>
           </a:prstGeom>
+          <a:noFill/>
         </p:spPr>
       </p:pic>
     </p:spTree>
@@ -7269,9 +7229,7 @@
           <a:prstGeom prst="rect">
             <a:avLst/>
           </a:prstGeom>
-          <a:solidFill>
-            <a:schemeClr val="bg1"/>
-          </a:solidFill>
+          <a:noFill/>
           <a:ln>
             <a:solidFill>
               <a:schemeClr val="tx1"/>
@@ -7323,9 +7281,7 @@
           <a:prstGeom prst="rect">
             <a:avLst/>
           </a:prstGeom>
-          <a:solidFill>
-            <a:schemeClr val="bg1"/>
-          </a:solidFill>
+          <a:noFill/>
           <a:ln>
             <a:solidFill>
               <a:schemeClr val="tx1"/>
@@ -7377,9 +7333,7 @@
           <a:prstGeom prst="rect">
             <a:avLst/>
           </a:prstGeom>
-          <a:solidFill>
-            <a:schemeClr val="bg1"/>
-          </a:solidFill>
+          <a:noFill/>
           <a:ln>
             <a:solidFill>
               <a:schemeClr val="tx1"/>
@@ -7431,9 +7385,7 @@
           <a:prstGeom prst="rect">
             <a:avLst/>
           </a:prstGeom>
-          <a:solidFill>
-            <a:schemeClr val="bg1"/>
-          </a:solidFill>
+          <a:noFill/>
           <a:ln>
             <a:solidFill>
               <a:schemeClr val="tx1"/>
@@ -7485,9 +7437,7 @@
           <a:prstGeom prst="rect">
             <a:avLst/>
           </a:prstGeom>
-          <a:solidFill>
-            <a:schemeClr val="bg1"/>
-          </a:solidFill>
+          <a:noFill/>
           <a:ln>
             <a:solidFill>
               <a:schemeClr val="tx1"/>
@@ -7539,9 +7489,7 @@
           <a:prstGeom prst="rect">
             <a:avLst/>
           </a:prstGeom>
-          <a:solidFill>
-            <a:schemeClr val="bg1"/>
-          </a:solidFill>
+          <a:noFill/>
           <a:ln>
             <a:solidFill>
               <a:schemeClr val="tx1"/>
@@ -7593,9 +7541,7 @@
           <a:prstGeom prst="rect">
             <a:avLst/>
           </a:prstGeom>
-          <a:solidFill>
-            <a:schemeClr val="bg1"/>
-          </a:solidFill>
+          <a:noFill/>
           <a:ln>
             <a:solidFill>
               <a:schemeClr val="tx1"/>
@@ -7655,6 +7601,7 @@
           <a:prstGeom prst="rect">
             <a:avLst/>
           </a:prstGeom>
+          <a:noFill/>
         </p:spPr>
       </p:pic>
       <p:pic>
@@ -7685,6 +7632,7 @@
           <a:prstGeom prst="rect">
             <a:avLst/>
           </a:prstGeom>
+          <a:noFill/>
         </p:spPr>
       </p:pic>
       <p:pic>
@@ -7715,6 +7663,7 @@
           <a:prstGeom prst="rect">
             <a:avLst/>
           </a:prstGeom>
+          <a:noFill/>
         </p:spPr>
       </p:pic>
       <p:pic>
@@ -7745,6 +7694,7 @@
           <a:prstGeom prst="rect">
             <a:avLst/>
           </a:prstGeom>
+          <a:noFill/>
         </p:spPr>
       </p:pic>
       <p:pic>
@@ -7775,6 +7725,7 @@
           <a:prstGeom prst="rect">
             <a:avLst/>
           </a:prstGeom>
+          <a:noFill/>
         </p:spPr>
       </p:pic>
       <p:pic>
@@ -7805,6 +7756,7 @@
           <a:prstGeom prst="rect">
             <a:avLst/>
           </a:prstGeom>
+          <a:noFill/>
         </p:spPr>
       </p:pic>
       <p:pic>
@@ -7835,6 +7787,7 @@
           <a:prstGeom prst="rect">
             <a:avLst/>
           </a:prstGeom>
+          <a:noFill/>
         </p:spPr>
       </p:pic>
     </p:spTree>
